--- a/decks/combined-bonding/combined-bonding_ch3_ionic-bonding.pptx
+++ b/decks/combined-bonding/combined-bonding_ch3_ionic-bonding.pptx
@@ -127,30 +127,30 @@
   <p:extLst>
     <p:ext uri="{521415D9-36F7-43E2-AB2F-B90AF26B5E84}">
       <p14:sectionLst xmlns:p14="http://schemas.microsoft.com/office/powerpoint/2010/main">
-        <p14:section name="Opening" id="{178f2837-669d-666b-455a-fc9b02623ad5}">
+        <p14:section name="Opening" id="{38f88292-a8e8-9971-9d9c-eb8ccf49ba0b}">
           <p14:sldIdLst>
             <p14:sldId id="256"/>
           </p14:sldIdLst>
         </p14:section>
-        <p14:section name="Gate" id="{79116511-c91e-352a-a660-638565b7fa6f}">
+        <p14:section name="Gate" id="{dd1c52ba-c91d-b501-fe9d-58cd65f7e754}">
           <p14:sldIdLst>
             <p14:sldId id="257"/>
             <p14:sldId id="258"/>
           </p14:sldIdLst>
         </p14:section>
-        <p14:section name="Pre-teach" id="{b3b6146d-c014-01ab-e1b2-3554fc42f0fb}">
+        <p14:section name="Pre-teach" id="{b4a1d93b-0c45-bb6c-fa0f-2c7ef6be4501}">
           <p14:sldIdLst>
             <p14:sldId id="259"/>
             <p14:sldId id="260"/>
           </p14:sldIdLst>
         </p14:section>
-        <p14:section name="Read-along" id="{7fba6518-8273-3b96-dfe3-0ebe1302261c}">
+        <p14:section name="Read-along" id="{9b871e34-7e74-59a0-97df-f00dbc68ead2}">
           <p14:sldIdLst>
             <p14:sldId id="261"/>
             <p14:sldId id="262"/>
           </p14:sldIdLst>
         </p14:section>
-        <p14:section name="Teach" id="{2b3b9675-f1e3-4a44-2be2-1e6235ad324a}">
+        <p14:section name="Teach" id="{0620ea3b-79aa-d288-2524-de3130e7e12f}">
           <p14:sldIdLst>
             <p14:sldId id="263"/>
             <p14:sldId id="264"/>
@@ -160,7 +160,7 @@
             <p14:sldId id="268"/>
           </p14:sldIdLst>
         </p14:section>
-        <p14:section name="Routes" id="{d9292b55-0c02-a6d9-cd18-c8e010ca46c7}">
+        <p14:section name="Routes" id="{dc92781e-61b3-548b-4aa6-a2ec39af67e8}">
           <p14:sldIdLst>
             <p14:sldId id="269"/>
             <p14:sldId id="270"/>
@@ -168,12 +168,12 @@
             <p14:sldId id="272"/>
           </p14:sldIdLst>
         </p14:section>
-        <p14:section name="Close" id="{5f3b83cb-da70-058e-906a-c88d63139f31}">
+        <p14:section name="Close" id="{6192b0be-a855-b74f-b481-4da880c9839a}">
           <p14:sldIdLst>
             <p14:sldId id="273"/>
           </p14:sldIdLst>
         </p14:section>
-        <p14:section name="Answers" id="{7cd1876e-056c-b9a7-270d-ee772ae5342a}">
+        <p14:section name="Answers" id="{66377764-40e7-8c7a-8fc3-6214e755afc0}">
           <p14:sldIdLst>
             <p14:sldId id="274"/>
             <p14:sldId id="275"/>
@@ -1424,7 +1424,7 @@
               <a:rPr lang="en-US" dirty="0"/>
               <a:t>Exit ticket — individual, silent, on a slip or mini-whiteboard. Recall before help: no notes, no lanes, no hints. Collect before pupils leave.
 Question: When sodium reacts with chlorine, what happens to the electrons?
-Answer: D   Each sodium atom transfers one electron to a chlorine atom. Ionic bonding is electron transfer from the metal to the non-metal: sodium loses one electron, chlorine gains it.
+Answer: B   Each sodium atom transfers one electron to a chlorine atom. Ionic bonding is electron transfer from the metal to the non-metal: sodium loses one electron, chlorine gains it.
 Source of this question: gate item 1 re-asked (options rotated) — this chapter has no third quick-check module.
 The ebook also holds task 3, "Explain the properties", for homework or the next lesson's do now.
 Sort the slips: correct → ready to move on; incorrect → start next lesson in the pre-teach group, with the read-along and the Support lane. Same destination next time.</a:t>
@@ -1607,8 +1607,8 @@
             <a:r>
               <a:rPr lang="en-US" dirty="0"/>
               <a:t>Do now — retrieval. Silent, no notes, no help: recall comes before any support. Give about four minutes.
-1. When sodium reacts with chlorine, what happens to the electrons?  →  A   Each sodium atom transfers one electron to a chlorine atom
-2. Calcium ions are Ca²⁺ and chloride ions are Cl⁻. What is the formula of calcium chloride?  →  A   CaCl₂
+1. When sodium reacts with chlorine, what happens to the electrons?  →  C   Each sodium atom transfers one electron to a chlorine atom
+2. Calcium ions are Ca²⁺ and chloride ions are Cl⁻. What is the formula of calcium chloride?  →  D   CaCl₂
 3. Solid sodium chloride does not conduct electricity because its ions cannot ___.  →  move
 Circulate: who gets 3/3 (Stretch route), 2/3 (Core), 0–1 (Support)? Use this to route pupils later in the lesson.</a:t>
             </a:r>
@@ -1699,7 +1699,7 @@
             <a:r>
               <a:rPr lang="en-US" dirty="0"/>
               <a:t>Answers — task 2: When does salt conduct?. Reveal the answer; pupils mark their own work in a different colour, then read the "why" together. Same destination for every lane, so one answer serves the whole class.
-Answer: A   When molten, the ions are free to move and carry charge
+Answer: C   When molten, the ions are free to move and carry charge
 Why: Molten ions are free to move. Moving charged particles carry a current; fixed ones cannot.
 Ask a Support pupil to explain one step, and a Stretch pupil to share their extension.</a:t>
             </a:r>
@@ -1790,7 +1790,7 @@
             <a:r>
               <a:rPr lang="en-US" dirty="0"/>
               <a:t>Answers — exit ticket: Exit ticket. Reveal the answer; pupils mark their own work in a different colour, then read the "why" together. Same destination for every lane, so one answer serves the whole class.
-Answer: D   Each sodium atom transfers one electron to a chlorine atom
+Answer: B   Each sodium atom transfers one electron to a chlorine atom
 Why: Ionic bonding is electron transfer from the metal to the non-metal: sodium loses one electron, chlorine gains it.
 Ask a Support pupil to explain one step, and a Stretch pupil to share their extension.</a:t>
             </a:r>
@@ -1881,8 +1881,8 @@
             <a:r>
               <a:rPr lang="en-US" dirty="0"/>
               <a:t>Answers — pupils mark their own in a different colour, then hands up for 3/3, 2/3, 1/3.
-1. A   Each sodium atom transfers one electron to a chlorine atom. Ionic bonding is electron transfer from the metal to the non-metal: sodium loses one electron, chlorine gains it.
-2. A   CaCl₂. One 2+ ion needs two 1− ions to cancel its charge, so the formula is CaCl₂.
+1. C   Each sodium atom transfers one electron to a chlorine atom. Ionic bonding is electron transfer from the metal to the non-metal: sodium loses one electron, chlorine gains it.
+2. D   CaCl₂. One 2+ ion needs two 1− ions to cancel its charge, so the formula is CaCl₂.
 3. move. In the solid lattice the ions are fixed in position. A current needs charged particles that are free to move.
 Say the route each score points to: 3/3 Stretch, 2/3 Core, 0–1 Support. Pupils may choose to move up.</a:t>
             </a:r>
@@ -9391,7 +9391,7 @@
                 <a:ea typeface="Calibri" pitchFamily="34" charset="-122"/>
                 <a:cs typeface="Calibri" pitchFamily="34" charset="-120"/>
               </a:rPr>
-              <a:t>When molten, the ions are free to move and carry charge</a:t>
+              <a:t>When molten, the ionic bonds turn into covalent bonds</a:t>
             </a:r>
             <a:endParaRPr lang="en-US" sz="2600" dirty="0"/>
           </a:p>
@@ -9465,7 +9465,7 @@
                 <a:ea typeface="Calibri" pitchFamily="34" charset="-122"/>
                 <a:cs typeface="Calibri" pitchFamily="34" charset="-120"/>
               </a:rPr>
-              <a:t>When molten, the ionic bonds turn into covalent bonds</a:t>
+              <a:t>When molten, the ions are free to move and carry charge</a:t>
             </a:r>
             <a:endParaRPr lang="en-US" sz="2600" dirty="0"/>
           </a:p>
@@ -10869,7 +10869,7 @@
                 <a:ea typeface="Calibri" pitchFamily="34" charset="-122"/>
                 <a:cs typeface="Calibri" pitchFamily="34" charset="-120"/>
               </a:rPr>
-              <a:t>Sodium and chlorine share a pair of electrons</a:t>
+              <a:t>Both atoms lose electrons into a shared sea</a:t>
             </a:r>
             <a:endParaRPr lang="en-US" sz="2400" dirty="0"/>
           </a:p>
@@ -10906,7 +10906,7 @@
                 <a:ea typeface="Calibri" pitchFamily="34" charset="-122"/>
                 <a:cs typeface="Calibri" pitchFamily="34" charset="-120"/>
               </a:rPr>
-              <a:t>Each chlorine atom transfers one electron to a sodium atom</a:t>
+              <a:t>Each sodium atom transfers one electron to a chlorine atom</a:t>
             </a:r>
             <a:endParaRPr lang="en-US" sz="2400" dirty="0"/>
           </a:p>
@@ -10943,7 +10943,7 @@
                 <a:ea typeface="Calibri" pitchFamily="34" charset="-122"/>
                 <a:cs typeface="Calibri" pitchFamily="34" charset="-120"/>
               </a:rPr>
-              <a:t>Both atoms lose electrons into a shared sea</a:t>
+              <a:t>Each chlorine atom transfers one electron to a sodium atom</a:t>
             </a:r>
             <a:endParaRPr lang="en-US" sz="2400" dirty="0"/>
           </a:p>
@@ -10980,7 +10980,7 @@
                 <a:ea typeface="Calibri" pitchFamily="34" charset="-122"/>
                 <a:cs typeface="Calibri" pitchFamily="34" charset="-120"/>
               </a:rPr>
-              <a:t>Each sodium atom transfers one electron to a chlorine atom</a:t>
+              <a:t>Sodium and chlorine share a pair of electrons</a:t>
             </a:r>
             <a:endParaRPr lang="en-US" sz="2400" dirty="0"/>
           </a:p>
@@ -11919,7 +11919,7 @@
                 <a:ea typeface="Calibri" pitchFamily="34" charset="-122"/>
                 <a:cs typeface="Calibri" pitchFamily="34" charset="-120"/>
               </a:rPr>
-              <a:t>Each sodium atom transfers one electron to a chlorine atom</a:t>
+              <a:t>Sodium and chlorine share a pair of electrons</a:t>
             </a:r>
             <a:endParaRPr lang="en-US" sz="1800" dirty="0"/>
           </a:p>
@@ -11956,7 +11956,7 @@
                 <a:ea typeface="Calibri" pitchFamily="34" charset="-122"/>
                 <a:cs typeface="Calibri" pitchFamily="34" charset="-120"/>
               </a:rPr>
-              <a:t>Sodium and chlorine share a pair of electrons</a:t>
+              <a:t>Both atoms lose electrons into a shared sea</a:t>
             </a:r>
             <a:endParaRPr lang="en-US" sz="1800" dirty="0"/>
           </a:p>
@@ -11993,7 +11993,7 @@
                 <a:ea typeface="Calibri" pitchFamily="34" charset="-122"/>
                 <a:cs typeface="Calibri" pitchFamily="34" charset="-120"/>
               </a:rPr>
-              <a:t>Each chlorine atom transfers one electron to a sodium atom</a:t>
+              <a:t>Each sodium atom transfers one electron to a chlorine atom</a:t>
             </a:r>
             <a:endParaRPr lang="en-US" sz="1800" dirty="0"/>
           </a:p>
@@ -12030,7 +12030,7 @@
                 <a:ea typeface="Calibri" pitchFamily="34" charset="-122"/>
                 <a:cs typeface="Calibri" pitchFamily="34" charset="-120"/>
               </a:rPr>
-              <a:t>Both atoms lose electrons into a shared sea</a:t>
+              <a:t>Each chlorine atom transfers one electron to a sodium atom</a:t>
             </a:r>
             <a:endParaRPr lang="en-US" sz="1800" dirty="0"/>
           </a:p>
@@ -12234,7 +12234,7 @@
                 <a:ea typeface="Calibri" pitchFamily="34" charset="-122"/>
                 <a:cs typeface="Calibri" pitchFamily="34" charset="-120"/>
               </a:rPr>
-              <a:t>CaCl₂</a:t>
+              <a:t>Ca₂Cl</a:t>
             </a:r>
             <a:endParaRPr lang="en-US" sz="2000" dirty="0"/>
           </a:p>
@@ -12271,7 +12271,7 @@
                 <a:ea typeface="Calibri" pitchFamily="34" charset="-122"/>
                 <a:cs typeface="Calibri" pitchFamily="34" charset="-120"/>
               </a:rPr>
-              <a:t>CaCl</a:t>
+              <a:t>Ca₂Cl₂</a:t>
             </a:r>
             <a:endParaRPr lang="en-US" sz="2000" dirty="0"/>
           </a:p>
@@ -12308,7 +12308,7 @@
                 <a:ea typeface="Calibri" pitchFamily="34" charset="-122"/>
                 <a:cs typeface="Calibri" pitchFamily="34" charset="-120"/>
               </a:rPr>
-              <a:t>Ca₂Cl</a:t>
+              <a:t>CaCl</a:t>
             </a:r>
             <a:endParaRPr lang="en-US" sz="2000" dirty="0"/>
           </a:p>
@@ -12345,7 +12345,7 @@
                 <a:ea typeface="Calibri" pitchFamily="34" charset="-122"/>
                 <a:cs typeface="Calibri" pitchFamily="34" charset="-120"/>
               </a:rPr>
-              <a:t>Ca₂Cl₂</a:t>
+              <a:t>CaCl₂</a:t>
             </a:r>
             <a:endParaRPr lang="en-US" sz="2000" dirty="0"/>
           </a:p>
@@ -12882,7 +12882,7 @@
                 <a:ea typeface="Cambria" pitchFamily="34" charset="-122"/>
                 <a:cs typeface="Cambria" pitchFamily="34" charset="-120"/>
               </a:rPr>
-              <a:t>A   When molten, the ions are free to move and carry charge</a:t>
+              <a:t>C   When molten, the ions are free to move and carry charge</a:t>
             </a:r>
             <a:endParaRPr lang="en-US" sz="1800" dirty="0"/>
           </a:p>
@@ -13341,7 +13341,7 @@
                 <a:ea typeface="Cambria" pitchFamily="34" charset="-122"/>
                 <a:cs typeface="Cambria" pitchFamily="34" charset="-120"/>
               </a:rPr>
-              <a:t>D   Each sodium atom transfers one electron to a chlorine atom</a:t>
+              <a:t>B   Each sodium atom transfers one electron to a chlorine atom</a:t>
             </a:r>
             <a:endParaRPr lang="en-US" sz="1800" dirty="0"/>
           </a:p>
@@ -13862,7 +13862,7 @@
                 <a:ea typeface="Calibri" pitchFamily="34" charset="-122"/>
                 <a:cs typeface="Calibri" pitchFamily="34" charset="-120"/>
               </a:rPr>
-              <a:t>A   Each sodium atom transfers one electron to a chlorine atom</a:t>
+              <a:t>C   Each sodium atom transfers one electron to a chlorine atom</a:t>
             </a:r>
             <a:endParaRPr lang="en-US" sz="2200" dirty="0"/>
           </a:p>
@@ -14112,7 +14112,7 @@
                 <a:ea typeface="Calibri" pitchFamily="34" charset="-122"/>
                 <a:cs typeface="Calibri" pitchFamily="34" charset="-120"/>
               </a:rPr>
-              <a:t>A   CaCl₂</a:t>
+              <a:t>D   CaCl₂</a:t>
             </a:r>
             <a:endParaRPr lang="en-US" sz="2200" dirty="0"/>
           </a:p>

--- a/decks/combined-bonding/combined-bonding_ch3_ionic-bonding.pptx
+++ b/decks/combined-bonding/combined-bonding_ch3_ionic-bonding.pptx
@@ -127,30 +127,30 @@
   <p:extLst>
     <p:ext uri="{521415D9-36F7-43E2-AB2F-B90AF26B5E84}">
       <p14:sectionLst xmlns:p14="http://schemas.microsoft.com/office/powerpoint/2010/main">
-        <p14:section name="Opening" id="{38f88292-a8e8-9971-9d9c-eb8ccf49ba0b}">
+        <p14:section name="Opening" id="{3f0c321d-d489-b36a-3711-c9ca532bcc78}">
           <p14:sldIdLst>
             <p14:sldId id="256"/>
           </p14:sldIdLst>
         </p14:section>
-        <p14:section name="Gate" id="{dd1c52ba-c91d-b501-fe9d-58cd65f7e754}">
+        <p14:section name="Gate" id="{deab8cc4-8369-304a-bb29-16648a175269}">
           <p14:sldIdLst>
             <p14:sldId id="257"/>
             <p14:sldId id="258"/>
           </p14:sldIdLst>
         </p14:section>
-        <p14:section name="Pre-teach" id="{b4a1d93b-0c45-bb6c-fa0f-2c7ef6be4501}">
+        <p14:section name="Pre-teach" id="{93fa8f6f-754e-497a-c878-b77d0c3c3458}">
           <p14:sldIdLst>
             <p14:sldId id="259"/>
             <p14:sldId id="260"/>
           </p14:sldIdLst>
         </p14:section>
-        <p14:section name="Read-along" id="{9b871e34-7e74-59a0-97df-f00dbc68ead2}">
+        <p14:section name="Read-along" id="{7a64ac4d-37c6-330b-6529-32b72a0d7dc4}">
           <p14:sldIdLst>
             <p14:sldId id="261"/>
             <p14:sldId id="262"/>
           </p14:sldIdLst>
         </p14:section>
-        <p14:section name="Teach" id="{0620ea3b-79aa-d288-2524-de3130e7e12f}">
+        <p14:section name="Teach" id="{03b9022b-e76f-edb3-12ec-4bf472fa1475}">
           <p14:sldIdLst>
             <p14:sldId id="263"/>
             <p14:sldId id="264"/>
@@ -160,7 +160,7 @@
             <p14:sldId id="268"/>
           </p14:sldIdLst>
         </p14:section>
-        <p14:section name="Routes" id="{dc92781e-61b3-548b-4aa6-a2ec39af67e8}">
+        <p14:section name="Routes" id="{b641fe56-770f-2a2f-6b9b-61113e371f86}">
           <p14:sldIdLst>
             <p14:sldId id="269"/>
             <p14:sldId id="270"/>
@@ -168,12 +168,12 @@
             <p14:sldId id="272"/>
           </p14:sldIdLst>
         </p14:section>
-        <p14:section name="Close" id="{6192b0be-a855-b74f-b481-4da880c9839a}">
+        <p14:section name="Close" id="{07f5eb97-8fd9-ac65-6ce8-dffb9ae00758}">
           <p14:sldIdLst>
             <p14:sldId id="273"/>
           </p14:sldIdLst>
         </p14:section>
-        <p14:section name="Answers" id="{66377764-40e7-8c7a-8fc3-6214e755afc0}">
+        <p14:section name="Answers" id="{1031b66e-66f2-f77c-a09e-982a02fc1432}">
           <p14:sldIdLst>
             <p14:sldId id="274"/>
             <p14:sldId id="275"/>
